--- a/mss_ai_ppt_sample_assets/backend/data/templates/mss_technical_v2.pptx
+++ b/mss_ai_ppt_sample_assets/backend/data/templates/mss_technical_v2.pptx
@@ -2739,6 +2739,331 @@
 </c:chartSpace>
 </file>
 
+<file path=ppt/charts/chart7.xml><?xml version="1.0" encoding="utf-8"?>
+<c:chartSpace xmlns:c="http://schemas.openxmlformats.org/drawingml/2006/chart" xmlns:a="http://schemas.openxmlformats.org/drawingml/2006/main" xmlns:r="http://schemas.openxmlformats.org/officeDocument/2006/relationships">
+  <c:date1904 val="0"/>
+  <c:lang val="zh-CN"/>
+  <c:roundedCorners val="0"/>
+  <mc:AlternateContent xmlns:mc="http://schemas.openxmlformats.org/markup-compatibility/2006">
+    <mc:Choice xmlns:c14="http://schemas.microsoft.com/office/drawing/2007/8/2/chart" Requires="c14">
+      <c14:style val="102"/>
+    </mc:Choice>
+    <mc:Fallback>
+      <c:style val="2"/>
+    </mc:Fallback>
+  </mc:AlternateContent>
+  <c:clrMapOvr bg1="lt1" tx1="dk1" bg2="lt2" tx2="dk2" accent1="accent1" accent2="accent2" accent3="accent3" accent4="accent4" accent5="accent5" accent6="accent6" hlink="hlink" folHlink="folHlink"/>
+  <c:chart>
+    <c:autoTitleDeleted val="1"/>
+    <c:plotArea>
+      <c:layout/>
+      <c:lineChart>
+        <c:grouping val="standard"/>
+        <c:varyColors val="0"/>
+        <c:ser>
+          <c:idx val="0"/>
+          <c:order val="0"/>
+          <c:tx>
+            <c:strRef>
+              <c:f>[【企业】安全运营工作报告支撑数据.xlsx]数据统计!$L$84</c:f>
+              <c:strCache>
+                <c:ptCount val="1"/>
+                <c:pt idx="0">
+                  <c:v>平均响应时长</c:v>
+                </c:pt>
+              </c:strCache>
+            </c:strRef>
+          </c:tx>
+          <c:spPr>
+            <a:ln w="28575" cap="rnd">
+              <a:solidFill>
+                <a:schemeClr val="accent1"/>
+              </a:solidFill>
+              <a:round/>
+            </a:ln>
+            <a:effectLst/>
+          </c:spPr>
+          <c:marker>
+            <c:symbol val="none"/>
+          </c:marker>
+          <c:dLbls>
+            <c:numFmt formatCode="General" sourceLinked="1"/>
+            <c:spPr>
+              <a:noFill/>
+              <a:ln>
+                <a:noFill/>
+              </a:ln>
+              <a:effectLst/>
+            </c:spPr>
+            <c:txPr>
+              <a:bodyPr rot="0" spcFirstLastPara="0" vertOverflow="ellipsis" vert="horz" wrap="square" lIns="38100" tIns="19050" rIns="38100" bIns="19050" anchor="ctr" anchorCtr="1" forceAA="0"/>
+              <a:lstStyle/>
+              <a:p>
+                <a:pPr>
+                  <a:defRPr lang="zh-CN" sz="1000" b="0" i="0" u="none" strike="noStrike" kern="1200" baseline="0">
+                    <a:solidFill>
+                      <a:schemeClr val="tx1">
+                        <a:lumMod val="75000"/>
+                        <a:lumOff val="25000"/>
+                      </a:schemeClr>
+                    </a:solidFill>
+                    <a:latin typeface="微软雅黑" panose="020B0503020204020204" charset="-122"/>
+                    <a:ea typeface="微软雅黑" panose="020B0503020204020204" charset="-122"/>
+                    <a:cs typeface="微软雅黑" panose="020B0503020204020204" charset="-122"/>
+                    <a:sym typeface="微软雅黑" panose="020B0503020204020204" charset="-122"/>
+                  </a:defRPr>
+                </a:pPr>
+              </a:p>
+            </c:txPr>
+            <c:dLblPos val="r"/>
+            <c:showLegendKey val="0"/>
+            <c:showVal val="1"/>
+            <c:showCatName val="0"/>
+            <c:showSerName val="0"/>
+            <c:showPercent val="0"/>
+            <c:showBubbleSize val="0"/>
+            <c:showLeaderLines val="0"/>
+            <c:extLst>
+              <c:ext xmlns:c15="http://schemas.microsoft.com/office/drawing/2012/chart" uri="{CE6537A1-D6FC-4f65-9D91-7224C49458BB}">
+                <c15:layout/>
+                <c15:showLeaderLines val="1"/>
+                <c15:leaderLines>
+                  <c:spPr>
+                    <a:ln w="9525" cap="flat" cmpd="sng" algn="ctr">
+                      <a:solidFill>
+                        <a:schemeClr val="tx1">
+                          <a:lumMod val="35000"/>
+                          <a:lumOff val="65000"/>
+                        </a:schemeClr>
+                      </a:solidFill>
+                      <a:round/>
+                    </a:ln>
+                    <a:effectLst/>
+                  </c:spPr>
+                </c15:leaderLines>
+              </c:ext>
+            </c:extLst>
+          </c:dLbls>
+          <c:cat>
+            <c:strRef>
+              <c:f>[【企业】安全运营工作报告支撑数据.xlsx]数据统计!$M$83:$U$83</c:f>
+              <c:strCache>
+                <c:ptCount val="9"/>
+                <c:pt idx="0">
+                  <c:v>2025-03</c:v>
+                </c:pt>
+                <c:pt idx="1" c:formatCode="yyyy/m/d">
+                  <c:v>2025-04</c:v>
+                </c:pt>
+                <c:pt idx="2" c:formatCode="yyyy/m/d">
+                  <c:v>2025-05</c:v>
+                </c:pt>
+                <c:pt idx="3" c:formatCode="yyyy/m/d">
+                  <c:v>2025-06</c:v>
+                </c:pt>
+                <c:pt idx="4" c:formatCode="yyyy/m/d">
+                  <c:v>2025-07</c:v>
+                </c:pt>
+                <c:pt idx="5" c:formatCode="yyyy/m/d">
+                  <c:v>2025-08</c:v>
+                </c:pt>
+                <c:pt idx="6" c:formatCode="yyyy/m/d">
+                  <c:v>2025-09</c:v>
+                </c:pt>
+                <c:pt idx="7" c:formatCode="yyyy/m/d">
+                  <c:v>2025-10</c:v>
+                </c:pt>
+                <c:pt idx="8" c:formatCode="yyyy/m/d">
+                  <c:v>2025-11</c:v>
+                </c:pt>
+              </c:strCache>
+            </c:strRef>
+          </c:cat>
+          <c:val>
+            <c:numRef>
+              <c:f>[【企业】安全运营工作报告支撑数据.xlsx]数据统计!$M$84:$U$84</c:f>
+              <c:numCache>
+                <c:formatCode>0.00_ </c:formatCode>
+                <c:ptCount val="9"/>
+                <c:pt idx="0">
+                  <c:v>26.6</c:v>
+                </c:pt>
+                <c:pt idx="1">
+                  <c:v>15.25</c:v>
+                </c:pt>
+                <c:pt idx="2">
+                  <c:v>0</c:v>
+                </c:pt>
+                <c:pt idx="3">
+                  <c:v>18</c:v>
+                </c:pt>
+                <c:pt idx="4">
+                  <c:v>10.6666666666667</c:v>
+                </c:pt>
+                <c:pt idx="5">
+                  <c:v>0</c:v>
+                </c:pt>
+                <c:pt idx="6">
+                  <c:v>0</c:v>
+                </c:pt>
+                <c:pt idx="7">
+                  <c:v>0</c:v>
+                </c:pt>
+                <c:pt idx="8">
+                  <c:v>0</c:v>
+                </c:pt>
+              </c:numCache>
+            </c:numRef>
+          </c:val>
+          <c:smooth val="0"/>
+        </c:ser>
+        <c:dLbls>
+          <c:showLegendKey val="0"/>
+          <c:showVal val="1"/>
+          <c:showCatName val="0"/>
+          <c:showSerName val="0"/>
+          <c:showPercent val="0"/>
+          <c:showBubbleSize val="0"/>
+        </c:dLbls>
+        <c:marker val="0"/>
+        <c:smooth val="0"/>
+        <c:axId val="926048702"/>
+        <c:axId val="51301949"/>
+      </c:lineChart>
+      <c:catAx>
+        <c:axId val="926048702"/>
+        <c:scaling>
+          <c:orientation val="minMax"/>
+        </c:scaling>
+        <c:delete val="0"/>
+        <c:axPos val="b"/>
+        <c:numFmt formatCode="General" sourceLinked="1"/>
+        <c:majorTickMark val="none"/>
+        <c:minorTickMark val="none"/>
+        <c:tickLblPos val="nextTo"/>
+        <c:spPr>
+          <a:noFill/>
+          <a:ln w="9525" cap="flat" cmpd="sng" algn="ctr">
+            <a:solidFill>
+              <a:schemeClr val="tx1">
+                <a:lumMod val="15000"/>
+                <a:lumOff val="85000"/>
+              </a:schemeClr>
+            </a:solidFill>
+            <a:round/>
+          </a:ln>
+          <a:effectLst/>
+        </c:spPr>
+        <c:txPr>
+          <a:bodyPr rot="-60000000" spcFirstLastPara="0" vertOverflow="ellipsis" vert="horz" wrap="square" anchor="ctr" anchorCtr="1" forceAA="0"/>
+          <a:lstStyle/>
+          <a:p>
+            <a:pPr>
+              <a:defRPr lang="zh-CN" sz="900" b="0" i="0" u="none" strike="noStrike" kern="1200" baseline="0">
+                <a:solidFill>
+                  <a:schemeClr val="tx1">
+                    <a:lumMod val="65000"/>
+                    <a:lumOff val="35000"/>
+                  </a:schemeClr>
+                </a:solidFill>
+                <a:latin typeface="微软雅黑" panose="020B0503020204020204" charset="-122"/>
+                <a:ea typeface="微软雅黑" panose="020B0503020204020204" charset="-122"/>
+                <a:cs typeface="微软雅黑" panose="020B0503020204020204" charset="-122"/>
+                <a:sym typeface="微软雅黑" panose="020B0503020204020204" charset="-122"/>
+              </a:defRPr>
+            </a:pPr>
+          </a:p>
+        </c:txPr>
+        <c:crossAx val="51301949"/>
+        <c:crosses val="autoZero"/>
+        <c:auto val="1"/>
+        <c:lblAlgn val="ctr"/>
+        <c:lblOffset val="100"/>
+        <c:noMultiLvlLbl val="0"/>
+      </c:catAx>
+      <c:valAx>
+        <c:axId val="51301949"/>
+        <c:scaling>
+          <c:orientation val="minMax"/>
+        </c:scaling>
+        <c:delete val="0"/>
+        <c:axPos val="l"/>
+        <c:numFmt formatCode="0.00_ " sourceLinked="1"/>
+        <c:majorTickMark val="none"/>
+        <c:minorTickMark val="none"/>
+        <c:tickLblPos val="nextTo"/>
+        <c:spPr>
+          <a:noFill/>
+          <a:ln>
+            <a:noFill/>
+          </a:ln>
+          <a:effectLst/>
+        </c:spPr>
+        <c:txPr>
+          <a:bodyPr rot="-60000000" spcFirstLastPara="0" vertOverflow="ellipsis" vert="horz" wrap="square" anchor="ctr" anchorCtr="1" forceAA="0"/>
+          <a:lstStyle/>
+          <a:p>
+            <a:pPr>
+              <a:defRPr lang="zh-CN" sz="900" b="0" i="0" u="none" strike="noStrike" kern="1200" baseline="0">
+                <a:solidFill>
+                  <a:schemeClr val="tx1">
+                    <a:lumMod val="65000"/>
+                    <a:lumOff val="35000"/>
+                  </a:schemeClr>
+                </a:solidFill>
+                <a:latin typeface="微软雅黑" panose="020B0503020204020204" charset="-122"/>
+                <a:ea typeface="微软雅黑" panose="020B0503020204020204" charset="-122"/>
+                <a:cs typeface="微软雅黑" panose="020B0503020204020204" charset="-122"/>
+                <a:sym typeface="微软雅黑" panose="020B0503020204020204" charset="-122"/>
+              </a:defRPr>
+            </a:pPr>
+          </a:p>
+        </c:txPr>
+        <c:crossAx val="926048702"/>
+        <c:crosses val="autoZero"/>
+        <c:crossBetween val="between"/>
+      </c:valAx>
+      <c:spPr>
+        <a:noFill/>
+        <a:ln>
+          <a:noFill/>
+        </a:ln>
+        <a:effectLst/>
+      </c:spPr>
+    </c:plotArea>
+    <c:plotVisOnly val="1"/>
+    <c:dispBlanksAs val="gap"/>
+    <c:showDLblsOverMax val="0"/>
+  </c:chart>
+  <c:spPr>
+    <a:noFill/>
+    <a:ln w="9525" cap="flat" cmpd="sng" algn="ctr">
+      <a:noFill/>
+      <a:prstDash val="solid"/>
+      <a:round/>
+    </a:ln>
+    <a:effectLst/>
+  </c:spPr>
+  <c:txPr>
+    <a:bodyPr/>
+    <a:lstStyle/>
+    <a:p>
+      <a:pPr>
+        <a:defRPr lang="zh-CN" b="0">
+          <a:latin typeface="微软雅黑" panose="020B0503020204020204" charset="-122"/>
+          <a:ea typeface="微软雅黑" panose="020B0503020204020204" charset="-122"/>
+          <a:cs typeface="微软雅黑" panose="020B0503020204020204" charset="-122"/>
+          <a:sym typeface="微软雅黑" panose="020B0503020204020204" charset="-122"/>
+        </a:defRPr>
+      </a:pPr>
+    </a:p>
+  </c:txPr>
+  <c:externalData r:id="rId1">
+    <c:autoUpdate val="0"/>
+  </c:externalData>
+</c:chartSpace>
+</file>
+
 <file path=ppt/charts/colors1.xml><?xml version="1.0" encoding="utf-8"?>
 <cs:colorStyle xmlns:cs="http://schemas.microsoft.com/office/drawing/2012/chartStyle" xmlns:a="http://schemas.openxmlformats.org/drawingml/2006/main" meth="cycle" id="10">
   <a:schemeClr val="accent1"/>
@@ -2973,6 +3298,46 @@
 </cs:colorStyle>
 </file>
 
+<file path=ppt/charts/colors7.xml><?xml version="1.0" encoding="utf-8"?>
+<cs:colorStyle xmlns:cs="http://schemas.microsoft.com/office/drawing/2012/chartStyle" xmlns:a="http://schemas.openxmlformats.org/drawingml/2006/main" meth="cycle" id="10">
+  <a:schemeClr val="accent1"/>
+  <a:schemeClr val="accent2"/>
+  <a:schemeClr val="accent3"/>
+  <a:schemeClr val="accent4"/>
+  <a:schemeClr val="accent5"/>
+  <a:schemeClr val="accent6"/>
+  <cs:variation/>
+  <cs:variation>
+    <a:lumMod val="60000"/>
+  </cs:variation>
+  <cs:variation>
+    <a:lumMod val="80000"/>
+    <a:lumOff val="20000"/>
+  </cs:variation>
+  <cs:variation>
+    <a:lumMod val="80000"/>
+  </cs:variation>
+  <cs:variation>
+    <a:lumMod val="60000"/>
+    <a:lumOff val="40000"/>
+  </cs:variation>
+  <cs:variation>
+    <a:lumMod val="50000"/>
+  </cs:variation>
+  <cs:variation>
+    <a:lumMod val="70000"/>
+    <a:lumOff val="30000"/>
+  </cs:variation>
+  <cs:variation>
+    <a:lumMod val="70000"/>
+  </cs:variation>
+  <cs:variation>
+    <a:lumMod val="50000"/>
+    <a:lumOff val="50000"/>
+  </cs:variation>
+</cs:colorStyle>
+</file>
+
 <file path=ppt/charts/style1.xml><?xml version="1.0" encoding="utf-8"?>
 <cs:chartStyle xmlns:cs="http://schemas.microsoft.com/office/drawing/2012/chartStyle" xmlns:a="http://schemas.openxmlformats.org/drawingml/2006/main" id="10001">
   <cs:axisTitle>
@@ -6040,6 +6405,511 @@
           </a:schemeClr>
         </a:solidFill>
         <a:round/>
+      </a:ln>
+    </cs:spPr>
+  </cs:upBar>
+  <cs:valueAxis>
+    <cs:lnRef idx="0"/>
+    <cs:fillRef idx="0"/>
+    <cs:effectRef idx="0"/>
+    <cs:fontRef idx="minor">
+      <a:schemeClr val="tx1">
+        <a:lumMod val="65000"/>
+        <a:lumOff val="35000"/>
+      </a:schemeClr>
+    </cs:fontRef>
+    <cs:defRPr sz="900" kern="1200"/>
+  </cs:valueAxis>
+  <cs:wall>
+    <cs:lnRef idx="0"/>
+    <cs:fillRef idx="0"/>
+    <cs:effectRef idx="0"/>
+    <cs:fontRef idx="minor">
+      <a:schemeClr val="tx1"/>
+    </cs:fontRef>
+    <cs:spPr>
+      <a:noFill/>
+      <a:ln>
+        <a:noFill/>
+      </a:ln>
+    </cs:spPr>
+  </cs:wall>
+</cs:chartStyle>
+</file>
+
+<file path=ppt/charts/style7.xml><?xml version="1.0" encoding="utf-8"?>
+<cs:chartStyle xmlns:cs="http://schemas.microsoft.com/office/drawing/2012/chartStyle" xmlns:a="http://schemas.openxmlformats.org/drawingml/2006/main" id="10028">
+  <cs:axisTitle>
+    <cs:lnRef idx="0"/>
+    <cs:fillRef idx="0"/>
+    <cs:effectRef idx="0"/>
+    <cs:fontRef idx="minor">
+      <a:schemeClr val="tx1">
+        <a:lumMod val="65000"/>
+        <a:lumOff val="35000"/>
+      </a:schemeClr>
+    </cs:fontRef>
+    <cs:defRPr sz="1000" kern="1200"/>
+  </cs:axisTitle>
+  <cs:categoryAxis>
+    <cs:lnRef idx="0"/>
+    <cs:fillRef idx="0"/>
+    <cs:effectRef idx="0"/>
+    <cs:fontRef idx="minor">
+      <a:schemeClr val="tx1">
+        <a:lumMod val="65000"/>
+        <a:lumOff val="35000"/>
+      </a:schemeClr>
+    </cs:fontRef>
+    <cs:spPr>
+      <a:ln w="9525" cap="flat" cmpd="sng" algn="ctr">
+        <a:solidFill>
+          <a:schemeClr val="tx1">
+            <a:lumMod val="15000"/>
+            <a:lumOff val="85000"/>
+          </a:schemeClr>
+        </a:solidFill>
+        <a:round/>
+      </a:ln>
+    </cs:spPr>
+    <cs:defRPr sz="900" kern="1200"/>
+  </cs:categoryAxis>
+  <cs:chartArea mods="allowNoFillOverride allowNoLineOverride">
+    <cs:lnRef idx="0"/>
+    <cs:fillRef idx="0"/>
+    <cs:effectRef idx="0"/>
+    <cs:fontRef idx="minor">
+      <a:schemeClr val="tx1"/>
+    </cs:fontRef>
+    <cs:spPr>
+      <a:solidFill>
+        <a:schemeClr val="bg1"/>
+      </a:solidFill>
+      <a:ln w="9525" cap="flat" cmpd="sng" algn="ctr">
+        <a:solidFill>
+          <a:schemeClr val="tx1">
+            <a:lumMod val="15000"/>
+            <a:lumOff val="85000"/>
+          </a:schemeClr>
+        </a:solidFill>
+        <a:round/>
+      </a:ln>
+    </cs:spPr>
+    <cs:defRPr sz="1000" kern="1200"/>
+  </cs:chartArea>
+  <cs:dataLabel>
+    <cs:lnRef idx="0"/>
+    <cs:fillRef idx="0"/>
+    <cs:effectRef idx="0"/>
+    <cs:fontRef idx="minor">
+      <a:schemeClr val="tx1">
+        <a:lumMod val="75000"/>
+        <a:lumOff val="25000"/>
+      </a:schemeClr>
+    </cs:fontRef>
+    <cs:defRPr sz="1000" kern="1200"/>
+  </cs:dataLabel>
+  <cs:dataLabelCallout>
+    <cs:lnRef idx="0"/>
+    <cs:fillRef idx="0"/>
+    <cs:effectRef idx="0"/>
+    <cs:fontRef idx="minor">
+      <a:schemeClr val="dk1">
+        <a:lumMod val="65000"/>
+        <a:lumOff val="35000"/>
+      </a:schemeClr>
+    </cs:fontRef>
+    <cs:spPr>
+      <a:solidFill>
+        <a:schemeClr val="lt1"/>
+      </a:solidFill>
+      <a:ln>
+        <a:solidFill>
+          <a:schemeClr val="dk1">
+            <a:lumMod val="25000"/>
+            <a:lumOff val="75000"/>
+          </a:schemeClr>
+        </a:solidFill>
+      </a:ln>
+    </cs:spPr>
+    <cs:defRPr sz="1000" kern="1200"/>
+    <cs:bodyPr rot="0" spcFirstLastPara="1" vertOverflow="clip" horzOverflow="clip" vert="horz" wrap="square" lIns="36576" tIns="18288" rIns="36576" bIns="18288" anchor="ctr" anchorCtr="1">
+      <a:spAutoFit/>
+    </cs:bodyPr>
+  </cs:dataLabelCallout>
+  <cs:dataPoint>
+    <cs:lnRef idx="0"/>
+    <cs:fillRef idx="1">
+      <cs:styleClr val="auto"/>
+    </cs:fillRef>
+    <cs:effectRef idx="0"/>
+    <cs:fontRef idx="minor">
+      <a:schemeClr val="tx1"/>
+    </cs:fontRef>
+  </cs:dataPoint>
+  <cs:dataPoint3D>
+    <cs:lnRef idx="0"/>
+    <cs:fillRef idx="1">
+      <cs:styleClr val="auto"/>
+    </cs:fillRef>
+    <cs:effectRef idx="0"/>
+    <cs:fontRef idx="minor">
+      <a:schemeClr val="tx1"/>
+    </cs:fontRef>
+  </cs:dataPoint3D>
+  <cs:dataPointLine>
+    <cs:lnRef idx="0">
+      <cs:styleClr val="auto"/>
+    </cs:lnRef>
+    <cs:fillRef idx="0">
+      <cs:styleClr val="auto"/>
+    </cs:fillRef>
+    <cs:effectRef idx="0"/>
+    <cs:fontRef idx="minor">
+      <a:schemeClr val="dk1"/>
+    </cs:fontRef>
+    <cs:spPr>
+      <a:ln w="28575" cap="rnd">
+        <a:solidFill>
+          <a:schemeClr val="phClr"/>
+        </a:solidFill>
+        <a:round/>
+      </a:ln>
+      <a:effectLst/>
+    </cs:spPr>
+  </cs:dataPointLine>
+  <cs:dataPointMarker>
+    <cs:lnRef idx="0">
+      <cs:styleClr val="auto"/>
+    </cs:lnRef>
+    <cs:fillRef idx="1">
+      <cs:styleClr val="auto"/>
+    </cs:fillRef>
+    <cs:effectRef idx="0"/>
+    <cs:fontRef idx="minor">
+      <a:schemeClr val="tx1"/>
+    </cs:fontRef>
+    <cs:spPr>
+      <a:ln w="9525">
+        <a:solidFill>
+          <a:schemeClr val="phClr"/>
+        </a:solidFill>
+      </a:ln>
+    </cs:spPr>
+  </cs:dataPointMarker>
+  <cs:dataPointMarkerLayout symbol="circle" size="5"/>
+  <cs:dataPointWireframe>
+    <cs:lnRef idx="0">
+      <cs:styleClr val="auto"/>
+    </cs:lnRef>
+    <cs:fillRef idx="1"/>
+    <cs:effectRef idx="0"/>
+    <cs:fontRef idx="minor">
+      <a:schemeClr val="tx1"/>
+    </cs:fontRef>
+    <cs:spPr>
+      <a:ln w="9525" cap="rnd">
+        <a:solidFill>
+          <a:schemeClr val="phClr"/>
+        </a:solidFill>
+        <a:round/>
+      </a:ln>
+    </cs:spPr>
+  </cs:dataPointWireframe>
+  <cs:dataTable>
+    <cs:lnRef idx="0"/>
+    <cs:fillRef idx="0"/>
+    <cs:effectRef idx="0"/>
+    <cs:fontRef idx="minor">
+      <a:schemeClr val="tx1">
+        <a:lumMod val="65000"/>
+        <a:lumOff val="35000"/>
+      </a:schemeClr>
+    </cs:fontRef>
+    <cs:spPr>
+      <a:noFill/>
+      <a:ln w="9525" cap="flat" cmpd="sng" algn="ctr">
+        <a:solidFill>
+          <a:schemeClr val="tx1">
+            <a:lumMod val="15000"/>
+            <a:lumOff val="85000"/>
+          </a:schemeClr>
+        </a:solidFill>
+        <a:round/>
+      </a:ln>
+    </cs:spPr>
+    <cs:defRPr sz="900" kern="1200"/>
+  </cs:dataTable>
+  <cs:downBar>
+    <cs:lnRef idx="0"/>
+    <cs:fillRef idx="0"/>
+    <cs:effectRef idx="0"/>
+    <cs:fontRef idx="minor">
+      <a:schemeClr val="dk1"/>
+    </cs:fontRef>
+    <cs:spPr>
+      <a:solidFill>
+        <a:schemeClr val="dk1">
+          <a:lumMod val="65000"/>
+          <a:lumOff val="35000"/>
+        </a:schemeClr>
+      </a:solidFill>
+      <a:ln w="9525">
+        <a:solidFill>
+          <a:schemeClr val="tx1">
+            <a:lumMod val="65000"/>
+            <a:lumOff val="35000"/>
+          </a:schemeClr>
+        </a:solidFill>
+      </a:ln>
+    </cs:spPr>
+  </cs:downBar>
+  <cs:dropLine>
+    <cs:lnRef idx="0"/>
+    <cs:fillRef idx="0"/>
+    <cs:effectRef idx="0"/>
+    <cs:fontRef idx="minor">
+      <a:schemeClr val="tx1"/>
+    </cs:fontRef>
+    <cs:spPr>
+      <a:ln w="9525" cap="flat" cmpd="sng" algn="ctr">
+        <a:solidFill>
+          <a:schemeClr val="tx1">
+            <a:lumMod val="35000"/>
+            <a:lumOff val="65000"/>
+          </a:schemeClr>
+        </a:solidFill>
+        <a:round/>
+      </a:ln>
+    </cs:spPr>
+  </cs:dropLine>
+  <cs:errorBar>
+    <cs:lnRef idx="0"/>
+    <cs:fillRef idx="0"/>
+    <cs:effectRef idx="0"/>
+    <cs:fontRef idx="minor">
+      <a:schemeClr val="tx1"/>
+    </cs:fontRef>
+    <cs:spPr>
+      <a:ln w="9525" cap="flat" cmpd="sng" algn="ctr">
+        <a:solidFill>
+          <a:schemeClr val="tx1">
+            <a:lumMod val="65000"/>
+            <a:lumOff val="35000"/>
+          </a:schemeClr>
+        </a:solidFill>
+        <a:round/>
+      </a:ln>
+    </cs:spPr>
+  </cs:errorBar>
+  <cs:floor>
+    <cs:lnRef idx="0"/>
+    <cs:fillRef idx="0"/>
+    <cs:effectRef idx="0"/>
+    <cs:fontRef idx="minor">
+      <a:schemeClr val="tx1"/>
+    </cs:fontRef>
+    <cs:spPr>
+      <a:noFill/>
+      <a:ln>
+        <a:noFill/>
+      </a:ln>
+    </cs:spPr>
+  </cs:floor>
+  <cs:gridlineMajor>
+    <cs:lnRef idx="0"/>
+    <cs:fillRef idx="0"/>
+    <cs:effectRef idx="0"/>
+    <cs:fontRef idx="minor">
+      <a:schemeClr val="tx1"/>
+    </cs:fontRef>
+    <cs:spPr>
+      <a:ln w="9525" cap="flat" cmpd="sng" algn="ctr">
+        <a:solidFill>
+          <a:schemeClr val="lt1">
+            <a:lumMod val="90200"/>
+          </a:schemeClr>
+        </a:solidFill>
+        <a:round/>
+      </a:ln>
+    </cs:spPr>
+  </cs:gridlineMajor>
+  <cs:gridlineMinor>
+    <cs:lnRef idx="0"/>
+    <cs:fillRef idx="0"/>
+    <cs:effectRef idx="0"/>
+    <cs:fontRef idx="minor">
+      <a:schemeClr val="tx1"/>
+    </cs:fontRef>
+    <cs:spPr>
+      <a:ln w="9525" cap="flat" cmpd="sng" algn="ctr">
+        <a:solidFill>
+          <a:schemeClr val="tx1">
+            <a:lumMod val="5000"/>
+            <a:lumOff val="95000"/>
+          </a:schemeClr>
+        </a:solidFill>
+        <a:round/>
+      </a:ln>
+    </cs:spPr>
+  </cs:gridlineMinor>
+  <cs:hiLoLine>
+    <cs:lnRef idx="0"/>
+    <cs:fillRef idx="0"/>
+    <cs:effectRef idx="0"/>
+    <cs:fontRef idx="minor">
+      <a:schemeClr val="tx1"/>
+    </cs:fontRef>
+    <cs:spPr>
+      <a:ln w="9525" cap="flat" cmpd="sng" algn="ctr">
+        <a:solidFill>
+          <a:schemeClr val="tx1">
+            <a:lumMod val="75000"/>
+            <a:lumOff val="25000"/>
+          </a:schemeClr>
+        </a:solidFill>
+        <a:round/>
+      </a:ln>
+    </cs:spPr>
+  </cs:hiLoLine>
+  <cs:leaderLine>
+    <cs:lnRef idx="0"/>
+    <cs:fillRef idx="0"/>
+    <cs:effectRef idx="0"/>
+    <cs:fontRef idx="minor">
+      <a:schemeClr val="tx1"/>
+    </cs:fontRef>
+    <cs:spPr>
+      <a:ln w="9525" cap="flat" cmpd="sng" algn="ctr">
+        <a:solidFill>
+          <a:schemeClr val="tx1">
+            <a:lumMod val="35000"/>
+            <a:lumOff val="65000"/>
+          </a:schemeClr>
+        </a:solidFill>
+        <a:round/>
+      </a:ln>
+    </cs:spPr>
+  </cs:leaderLine>
+  <cs:legend>
+    <cs:lnRef idx="0"/>
+    <cs:fillRef idx="0"/>
+    <cs:effectRef idx="0"/>
+    <cs:fontRef idx="minor">
+      <a:schemeClr val="tx1">
+        <a:lumMod val="65000"/>
+        <a:lumOff val="35000"/>
+      </a:schemeClr>
+    </cs:fontRef>
+    <cs:defRPr sz="900" kern="1200"/>
+  </cs:legend>
+  <cs:plotArea mods="allowNoFillOverride allowNoLineOverride">
+    <cs:lnRef idx="0"/>
+    <cs:fillRef idx="0"/>
+    <cs:effectRef idx="0"/>
+    <cs:fontRef idx="minor">
+      <a:schemeClr val="tx1"/>
+    </cs:fontRef>
+  </cs:plotArea>
+  <cs:plotArea3D mods="allowNoFillOverride allowNoLineOverride">
+    <cs:lnRef idx="0"/>
+    <cs:fillRef idx="0"/>
+    <cs:effectRef idx="0"/>
+    <cs:fontRef idx="minor">
+      <a:schemeClr val="tx1"/>
+    </cs:fontRef>
+  </cs:plotArea3D>
+  <cs:seriesAxis>
+    <cs:lnRef idx="0"/>
+    <cs:fillRef idx="0"/>
+    <cs:effectRef idx="0"/>
+    <cs:fontRef idx="minor">
+      <a:schemeClr val="tx1">
+        <a:lumMod val="65000"/>
+        <a:lumOff val="35000"/>
+      </a:schemeClr>
+    </cs:fontRef>
+    <cs:defRPr sz="900" kern="1200"/>
+  </cs:seriesAxis>
+  <cs:seriesLine>
+    <cs:lnRef idx="0"/>
+    <cs:fillRef idx="0"/>
+    <cs:effectRef idx="0"/>
+    <cs:fontRef idx="minor">
+      <a:schemeClr val="tx1"/>
+    </cs:fontRef>
+    <cs:spPr>
+      <a:ln w="9525" cap="flat" cmpd="sng" algn="ctr">
+        <a:solidFill>
+          <a:schemeClr val="tx1">
+            <a:lumMod val="35000"/>
+            <a:lumOff val="65000"/>
+          </a:schemeClr>
+        </a:solidFill>
+        <a:round/>
+      </a:ln>
+    </cs:spPr>
+  </cs:seriesLine>
+  <cs:title>
+    <cs:lnRef idx="0"/>
+    <cs:fillRef idx="0"/>
+    <cs:effectRef idx="0"/>
+    <cs:fontRef idx="minor">
+      <a:schemeClr val="tx1">
+        <a:lumMod val="75000"/>
+        <a:lumOff val="25000"/>
+      </a:schemeClr>
+    </cs:fontRef>
+    <cs:defRPr sz="1400" b="1" kern="1200" baseline="0"/>
+  </cs:title>
+  <cs:trendline>
+    <cs:lnRef idx="0">
+      <cs:styleClr val="auto"/>
+    </cs:lnRef>
+    <cs:fillRef idx="0"/>
+    <cs:effectRef idx="0"/>
+    <cs:fontRef idx="minor">
+      <a:schemeClr val="tx1"/>
+    </cs:fontRef>
+    <cs:spPr>
+      <a:ln w="19050" cap="rnd">
+        <a:solidFill>
+          <a:schemeClr val="phClr"/>
+        </a:solidFill>
+        <a:prstDash val="sysDot"/>
+      </a:ln>
+    </cs:spPr>
+  </cs:trendline>
+  <cs:trendlineLabel>
+    <cs:lnRef idx="0"/>
+    <cs:fillRef idx="0"/>
+    <cs:effectRef idx="0"/>
+    <cs:fontRef idx="minor">
+      <a:schemeClr val="tx1">
+        <a:lumMod val="65000"/>
+        <a:lumOff val="35000"/>
+      </a:schemeClr>
+    </cs:fontRef>
+    <cs:defRPr sz="900" kern="1200"/>
+  </cs:trendlineLabel>
+  <cs:upBar>
+    <cs:lnRef idx="0"/>
+    <cs:fillRef idx="0"/>
+    <cs:effectRef idx="0"/>
+    <cs:fontRef idx="minor">
+      <a:schemeClr val="dk1"/>
+    </cs:fontRef>
+    <cs:spPr>
+      <a:solidFill>
+        <a:schemeClr val="lt1"/>
+      </a:solidFill>
+      <a:ln w="9525">
+        <a:solidFill>
+          <a:schemeClr val="tx1">
+            <a:lumMod val="15000"/>
+            <a:lumOff val="85000"/>
+          </a:schemeClr>
+        </a:solidFill>
       </a:ln>
     </cs:spPr>
   </cs:upBar>
@@ -11414,9 +12284,7 @@
   <p:cSld>
     <p:bg>
       <p:bgPr>
-        <a:solidFill>
-          <a:srgbClr val="0B1220"/>
-        </a:solidFill>
+        <a:noFill/>
         <a:effectLst/>
       </p:bgPr>
     </p:bg>
@@ -11508,51 +12376,6 @@
       </p:sp>
       <p:sp>
         <p:nvSpPr>
-          <p:cNvPr id="4" name="Rectangle 3"/>
-          <p:cNvSpPr/>
-          <p:nvPr/>
-        </p:nvSpPr>
-        <p:spPr>
-          <a:xfrm>
-            <a:off x="594360" y="960120"/>
-            <a:ext cx="11247120" cy="2423160"/>
-          </a:xfrm>
-          <a:prstGeom prst="rect">
-            <a:avLst/>
-          </a:prstGeom>
-          <a:solidFill>
-            <a:srgbClr val="111827"/>
-          </a:solidFill>
-          <a:ln w="12700">
-            <a:solidFill>
-              <a:srgbClr val="1F2937"/>
-            </a:solidFill>
-          </a:ln>
-        </p:spPr>
-        <p:style>
-          <a:lnRef idx="1">
-            <a:schemeClr val="accent1"/>
-          </a:lnRef>
-          <a:fillRef idx="3">
-            <a:schemeClr val="accent1"/>
-          </a:fillRef>
-          <a:effectRef idx="2">
-            <a:schemeClr val="accent1"/>
-          </a:effectRef>
-          <a:fontRef idx="minor">
-            <a:schemeClr val="lt1"/>
-          </a:fontRef>
-        </p:style>
-        <p:txBody>
-          <a:bodyPr rtlCol="0" anchor="ctr"/>
-          <a:lstStyle/>
-          <a:p>
-            <a:pPr algn="ctr"/>
-          </a:p>
-        </p:txBody>
-      </p:sp>
-      <p:sp>
-        <p:nvSpPr>
           <p:cNvPr id="5" name="TextBox 4"/>
           <p:cNvSpPr txBox="1"/>
           <p:nvPr/>
@@ -11625,51 +12448,6 @@
       </p:sp>
       <p:sp>
         <p:nvSpPr>
-          <p:cNvPr id="7" name="Rectangle 6"/>
-          <p:cNvSpPr/>
-          <p:nvPr/>
-        </p:nvSpPr>
-        <p:spPr>
-          <a:xfrm>
-            <a:off x="594360" y="3520440"/>
-            <a:ext cx="11247120" cy="2423160"/>
-          </a:xfrm>
-          <a:prstGeom prst="rect">
-            <a:avLst/>
-          </a:prstGeom>
-          <a:solidFill>
-            <a:srgbClr val="111827"/>
-          </a:solidFill>
-          <a:ln w="12700">
-            <a:solidFill>
-              <a:srgbClr val="1F2937"/>
-            </a:solidFill>
-          </a:ln>
-        </p:spPr>
-        <p:style>
-          <a:lnRef idx="1">
-            <a:schemeClr val="accent1"/>
-          </a:lnRef>
-          <a:fillRef idx="3">
-            <a:schemeClr val="accent1"/>
-          </a:fillRef>
-          <a:effectRef idx="2">
-            <a:schemeClr val="accent1"/>
-          </a:effectRef>
-          <a:fontRef idx="minor">
-            <a:schemeClr val="lt1"/>
-          </a:fontRef>
-        </p:style>
-        <p:txBody>
-          <a:bodyPr rtlCol="0" anchor="ctr"/>
-          <a:lstStyle/>
-          <a:p>
-            <a:pPr algn="ctr"/>
-          </a:p>
-        </p:txBody>
-      </p:sp>
-      <p:sp>
-        <p:nvSpPr>
           <p:cNvPr id="8" name="TextBox 7"/>
           <p:cNvSpPr txBox="1"/>
           <p:nvPr/>
@@ -11773,6 +12551,446 @@
             <a:r>
               <a:t>{{ATTACK_PATTERN_SUMMARY}}</a:t>
             </a:r>
+          </a:p>
+        </p:txBody>
+      </p:sp>
+      <p:sp>
+        <p:nvSpPr>
+          <p:cNvPr id="11" name="textbox 50"/>
+          <p:cNvSpPr/>
+          <p:nvPr/>
+        </p:nvSpPr>
+        <p:spPr>
+          <a:xfrm>
+            <a:off x="6888480" y="3974465"/>
+            <a:ext cx="4751705" cy="2370455"/>
+          </a:xfrm>
+          <a:prstGeom prst="rect">
+            <a:avLst/>
+          </a:prstGeom>
+          <a:solidFill>
+            <a:schemeClr val="accent4">
+              <a:lumMod val="20000"/>
+              <a:lumOff val="80000"/>
+            </a:schemeClr>
+          </a:solidFill>
+          <a:ln w="0" cap="flat">
+            <a:noFill/>
+            <a:prstDash val="solid"/>
+            <a:miter lim="0"/>
+          </a:ln>
+        </p:spPr>
+        <p:txBody>
+          <a:bodyPr vert="horz" wrap="square" lIns="0" tIns="0" rIns="0" bIns="0"/>
+          <a:p>
+            <a:pPr algn="l" rtl="0" eaLnBrk="0">
+              <a:lnSpc>
+                <a:spcPct val="109000"/>
+              </a:lnSpc>
+            </a:pPr>
+            <a:endParaRPr sz="2400" dirty="0">
+              <a:highlight>
+                <a:srgbClr val="FFFF00"/>
+              </a:highlight>
+              <a:latin typeface="Times New Roman" panose="02020603050405020304"/>
+              <a:ea typeface="Times New Roman" panose="02020603050405020304"/>
+              <a:cs typeface="Times New Roman" panose="02020603050405020304"/>
+            </a:endParaRPr>
+          </a:p>
+          <a:p>
+            <a:pPr marL="710565" algn="l" rtl="0" eaLnBrk="0">
+              <a:lnSpc>
+                <a:spcPts val="1085"/>
+              </a:lnSpc>
+              <a:spcBef>
+                <a:spcPts val="5"/>
+              </a:spcBef>
+            </a:pPr>
+            <a:endParaRPr sz="900" kern="0" spc="130" dirty="0">
+              <a:solidFill>
+                <a:srgbClr val="307050">
+                  <a:alpha val="100000"/>
+                </a:srgbClr>
+              </a:solidFill>
+              <a:highlight>
+                <a:srgbClr val="FFFF00"/>
+              </a:highlight>
+              <a:latin typeface="黑体" panose="02010609060101010101" charset="-122"/>
+              <a:ea typeface="黑体" panose="02010609060101010101" charset="-122"/>
+              <a:cs typeface="黑体" panose="02010609060101010101" charset="-122"/>
+            </a:endParaRPr>
+          </a:p>
+        </p:txBody>
+      </p:sp>
+      <p:graphicFrame>
+        <p:nvGraphicFramePr>
+          <p:cNvPr id="33" name="图表 32" descr="7b0a202020202263686172745265734964223a20223230343731343133220a7d0a"/>
+          <p:cNvGraphicFramePr/>
+          <p:nvPr/>
+        </p:nvGraphicFramePr>
+        <p:xfrm>
+          <a:off x="6888480" y="4445635"/>
+          <a:ext cx="4751705" cy="1940560"/>
+        </p:xfrm>
+        <a:graphic>
+          <a:graphicData uri="http://schemas.openxmlformats.org/drawingml/2006/chart">
+            <c:chart xmlns:c="http://schemas.openxmlformats.org/drawingml/2006/chart" xmlns:r="http://schemas.openxmlformats.org/officeDocument/2006/relationships" r:id="rId1"/>
+          </a:graphicData>
+        </a:graphic>
+      </p:graphicFrame>
+      <p:sp>
+        <p:nvSpPr>
+          <p:cNvPr id="35" name="íṥlïḍê"/>
+          <p:cNvSpPr txBox="1"/>
+          <p:nvPr>
+            <p:custDataLst>
+              <p:tags r:id="rId2"/>
+            </p:custDataLst>
+          </p:nvPr>
+        </p:nvSpPr>
+        <p:spPr>
+          <a:xfrm>
+            <a:off x="7019290" y="4057650"/>
+            <a:ext cx="2396490" cy="242570"/>
+          </a:xfrm>
+          <a:prstGeom prst="rect">
+            <a:avLst/>
+          </a:prstGeom>
+          <a:noFill/>
+        </p:spPr>
+        <p:txBody>
+          <a:bodyPr wrap="square" rtlCol="0" anchor="t" anchorCtr="0">
+            <a:noAutofit/>
+          </a:bodyPr>
+          <a:lstStyle>
+            <a:lvl1pPr marL="0" marR="0" indent="0" algn="l" defTabSz="825500" rtl="0" latinLnBrk="0">
+              <a:lnSpc>
+                <a:spcPct val="100000"/>
+              </a:lnSpc>
+              <a:spcBef>
+                <a:spcPts val="0"/>
+              </a:spcBef>
+              <a:spcAft>
+                <a:spcPts val="0"/>
+              </a:spcAft>
+              <a:buClrTx/>
+              <a:buSzTx/>
+              <a:buFontTx/>
+              <a:buNone/>
+              <a:defRPr sz="4000" b="1" i="0" u="none" strike="noStrike" cap="none" spc="0" baseline="0">
+                <a:solidFill>
+                  <a:srgbClr val="000000"/>
+                </a:solidFill>
+                <a:uFillTx/>
+                <a:latin typeface="+mn-lt"/>
+                <a:ea typeface="+mn-ea"/>
+                <a:cs typeface="+mn-cs"/>
+                <a:sym typeface="Helvetica Neue" panose="02000503000000020004"/>
+              </a:defRPr>
+            </a:lvl1pPr>
+            <a:lvl2pPr marL="0" marR="0" indent="457200" algn="l" defTabSz="825500" rtl="0" latinLnBrk="0">
+              <a:lnSpc>
+                <a:spcPct val="100000"/>
+              </a:lnSpc>
+              <a:spcBef>
+                <a:spcPts val="0"/>
+              </a:spcBef>
+              <a:spcAft>
+                <a:spcPts val="0"/>
+              </a:spcAft>
+              <a:buClrTx/>
+              <a:buSzTx/>
+              <a:buFontTx/>
+              <a:buNone/>
+              <a:defRPr sz="5500" b="1" i="0" u="none" strike="noStrike" cap="none" spc="0" baseline="0">
+                <a:solidFill>
+                  <a:srgbClr val="000000"/>
+                </a:solidFill>
+                <a:uFillTx/>
+                <a:latin typeface="+mn-lt"/>
+                <a:ea typeface="+mn-ea"/>
+                <a:cs typeface="+mn-cs"/>
+                <a:sym typeface="Helvetica Neue" panose="02000503000000020004"/>
+              </a:defRPr>
+            </a:lvl2pPr>
+            <a:lvl3pPr marL="0" marR="0" indent="914400" algn="l" defTabSz="825500" rtl="0" latinLnBrk="0">
+              <a:lnSpc>
+                <a:spcPct val="100000"/>
+              </a:lnSpc>
+              <a:spcBef>
+                <a:spcPts val="0"/>
+              </a:spcBef>
+              <a:spcAft>
+                <a:spcPts val="0"/>
+              </a:spcAft>
+              <a:buClrTx/>
+              <a:buSzTx/>
+              <a:buFontTx/>
+              <a:buNone/>
+              <a:defRPr sz="5500" b="1" i="0" u="none" strike="noStrike" cap="none" spc="0" baseline="0">
+                <a:solidFill>
+                  <a:srgbClr val="000000"/>
+                </a:solidFill>
+                <a:uFillTx/>
+                <a:latin typeface="+mn-lt"/>
+                <a:ea typeface="+mn-ea"/>
+                <a:cs typeface="+mn-cs"/>
+                <a:sym typeface="Helvetica Neue" panose="02000503000000020004"/>
+              </a:defRPr>
+            </a:lvl3pPr>
+            <a:lvl4pPr marL="0" marR="0" indent="1371600" algn="l" defTabSz="825500" rtl="0" latinLnBrk="0">
+              <a:lnSpc>
+                <a:spcPct val="100000"/>
+              </a:lnSpc>
+              <a:spcBef>
+                <a:spcPts val="0"/>
+              </a:spcBef>
+              <a:spcAft>
+                <a:spcPts val="0"/>
+              </a:spcAft>
+              <a:buClrTx/>
+              <a:buSzTx/>
+              <a:buFontTx/>
+              <a:buNone/>
+              <a:defRPr sz="5500" b="1" i="0" u="none" strike="noStrike" cap="none" spc="0" baseline="0">
+                <a:solidFill>
+                  <a:srgbClr val="000000"/>
+                </a:solidFill>
+                <a:uFillTx/>
+                <a:latin typeface="+mn-lt"/>
+                <a:ea typeface="+mn-ea"/>
+                <a:cs typeface="+mn-cs"/>
+                <a:sym typeface="Helvetica Neue" panose="02000503000000020004"/>
+              </a:defRPr>
+            </a:lvl4pPr>
+            <a:lvl5pPr marL="0" marR="0" indent="1828800" algn="l" defTabSz="825500" rtl="0" latinLnBrk="0">
+              <a:lnSpc>
+                <a:spcPct val="100000"/>
+              </a:lnSpc>
+              <a:spcBef>
+                <a:spcPts val="0"/>
+              </a:spcBef>
+              <a:spcAft>
+                <a:spcPts val="0"/>
+              </a:spcAft>
+              <a:buClrTx/>
+              <a:buSzTx/>
+              <a:buFontTx/>
+              <a:buNone/>
+              <a:defRPr sz="5500" b="1" i="0" u="none" strike="noStrike" cap="none" spc="0" baseline="0">
+                <a:solidFill>
+                  <a:srgbClr val="000000"/>
+                </a:solidFill>
+                <a:uFillTx/>
+                <a:latin typeface="+mn-lt"/>
+                <a:ea typeface="+mn-ea"/>
+                <a:cs typeface="+mn-cs"/>
+                <a:sym typeface="Helvetica Neue" panose="02000503000000020004"/>
+              </a:defRPr>
+            </a:lvl5pPr>
+            <a:lvl6pPr marL="0" marR="0" indent="2286000" algn="l" defTabSz="825500" rtl="0" latinLnBrk="0">
+              <a:lnSpc>
+                <a:spcPct val="100000"/>
+              </a:lnSpc>
+              <a:spcBef>
+                <a:spcPts val="0"/>
+              </a:spcBef>
+              <a:spcAft>
+                <a:spcPts val="0"/>
+              </a:spcAft>
+              <a:buClrTx/>
+              <a:buSzTx/>
+              <a:buFontTx/>
+              <a:buNone/>
+              <a:defRPr sz="5500" b="1" i="0" u="none" strike="noStrike" cap="none" spc="0" baseline="0">
+                <a:solidFill>
+                  <a:srgbClr val="000000"/>
+                </a:solidFill>
+                <a:uFillTx/>
+                <a:latin typeface="+mn-lt"/>
+                <a:ea typeface="+mn-ea"/>
+                <a:cs typeface="+mn-cs"/>
+                <a:sym typeface="Helvetica Neue" panose="02000503000000020004"/>
+              </a:defRPr>
+            </a:lvl6pPr>
+            <a:lvl7pPr marL="0" marR="0" indent="2743200" algn="l" defTabSz="825500" rtl="0" latinLnBrk="0">
+              <a:lnSpc>
+                <a:spcPct val="100000"/>
+              </a:lnSpc>
+              <a:spcBef>
+                <a:spcPts val="0"/>
+              </a:spcBef>
+              <a:spcAft>
+                <a:spcPts val="0"/>
+              </a:spcAft>
+              <a:buClrTx/>
+              <a:buSzTx/>
+              <a:buFontTx/>
+              <a:buNone/>
+              <a:defRPr sz="5500" b="1" i="0" u="none" strike="noStrike" cap="none" spc="0" baseline="0">
+                <a:solidFill>
+                  <a:srgbClr val="000000"/>
+                </a:solidFill>
+                <a:uFillTx/>
+                <a:latin typeface="+mn-lt"/>
+                <a:ea typeface="+mn-ea"/>
+                <a:cs typeface="+mn-cs"/>
+                <a:sym typeface="Helvetica Neue" panose="02000503000000020004"/>
+              </a:defRPr>
+            </a:lvl7pPr>
+            <a:lvl8pPr marL="0" marR="0" indent="3200400" algn="l" defTabSz="825500" rtl="0" latinLnBrk="0">
+              <a:lnSpc>
+                <a:spcPct val="100000"/>
+              </a:lnSpc>
+              <a:spcBef>
+                <a:spcPts val="0"/>
+              </a:spcBef>
+              <a:spcAft>
+                <a:spcPts val="0"/>
+              </a:spcAft>
+              <a:buClrTx/>
+              <a:buSzTx/>
+              <a:buFontTx/>
+              <a:buNone/>
+              <a:defRPr sz="5500" b="1" i="0" u="none" strike="noStrike" cap="none" spc="0" baseline="0">
+                <a:solidFill>
+                  <a:srgbClr val="000000"/>
+                </a:solidFill>
+                <a:uFillTx/>
+                <a:latin typeface="+mn-lt"/>
+                <a:ea typeface="+mn-ea"/>
+                <a:cs typeface="+mn-cs"/>
+                <a:sym typeface="Helvetica Neue" panose="02000503000000020004"/>
+              </a:defRPr>
+            </a:lvl8pPr>
+            <a:lvl9pPr marL="0" marR="0" indent="3657600" algn="l" defTabSz="825500" rtl="0" latinLnBrk="0">
+              <a:lnSpc>
+                <a:spcPct val="100000"/>
+              </a:lnSpc>
+              <a:spcBef>
+                <a:spcPts val="0"/>
+              </a:spcBef>
+              <a:spcAft>
+                <a:spcPts val="0"/>
+              </a:spcAft>
+              <a:buClrTx/>
+              <a:buSzTx/>
+              <a:buFontTx/>
+              <a:buNone/>
+              <a:defRPr sz="5500" b="1" i="0" u="none" strike="noStrike" cap="none" spc="0" baseline="0">
+                <a:solidFill>
+                  <a:srgbClr val="000000"/>
+                </a:solidFill>
+                <a:uFillTx/>
+                <a:latin typeface="+mn-lt"/>
+                <a:ea typeface="+mn-ea"/>
+                <a:cs typeface="+mn-cs"/>
+                <a:sym typeface="Helvetica Neue" panose="02000503000000020004"/>
+              </a:defRPr>
+            </a:lvl9pPr>
+          </a:lstStyle>
+          <a:p>
+            <a:pPr marL="28575" lvl="0" algn="l" defTabSz="2438400" eaLnBrk="0">
+              <a:lnSpc>
+                <a:spcPct val="98000"/>
+              </a:lnSpc>
+            </a:pPr>
+            <a:r>
+              <a:rPr lang="zh-CN" sz="1400" spc="30" dirty="0">
+                <a:solidFill>
+                  <a:srgbClr val="204080">
+                    <a:alpha val="100000"/>
+                  </a:srgbClr>
+                </a:solidFill>
+                <a:latin typeface="黑体" panose="02010609060101010101" charset="-122"/>
+                <a:ea typeface="黑体" panose="02010609060101010101" charset="-122"/>
+                <a:cs typeface="黑体" panose="02010609060101010101" charset="-122"/>
+                <a:sym typeface="+mn-ea"/>
+              </a:rPr>
+              <a:t>平均响应趋势（</a:t>
+            </a:r>
+            <a:r>
+              <a:rPr lang="zh-CN" sz="1400" spc="30" dirty="0">
+                <a:solidFill>
+                  <a:srgbClr val="204080">
+                    <a:alpha val="100000"/>
+                  </a:srgbClr>
+                </a:solidFill>
+                <a:latin typeface="黑体" panose="02010609060101010101" charset="-122"/>
+                <a:ea typeface="黑体" panose="02010609060101010101" charset="-122"/>
+                <a:cs typeface="黑体" panose="02010609060101010101" charset="-122"/>
+                <a:sym typeface="+mn-ea"/>
+              </a:rPr>
+              <a:t>分钟）</a:t>
+            </a:r>
+            <a:endParaRPr lang="zh-CN" sz="1400" spc="30" dirty="0">
+              <a:solidFill>
+                <a:srgbClr val="204080">
+                  <a:alpha val="100000"/>
+                </a:srgbClr>
+              </a:solidFill>
+              <a:latin typeface="黑体" panose="02010609060101010101" charset="-122"/>
+              <a:ea typeface="黑体" panose="02010609060101010101" charset="-122"/>
+              <a:cs typeface="黑体" panose="02010609060101010101" charset="-122"/>
+              <a:sym typeface="+mn-ea"/>
+            </a:endParaRPr>
+          </a:p>
+        </p:txBody>
+      </p:sp>
+      <p:sp>
+        <p:nvSpPr>
+          <p:cNvPr id="12" name="文本框 11"/>
+          <p:cNvSpPr txBox="1"/>
+          <p:nvPr/>
+        </p:nvSpPr>
+        <p:spPr>
+          <a:xfrm>
+            <a:off x="6095365" y="3543935"/>
+            <a:ext cx="6096000" cy="368300"/>
+          </a:xfrm>
+          <a:prstGeom prst="rect">
+            <a:avLst/>
+          </a:prstGeom>
+          <a:noFill/>
+        </p:spPr>
+        <p:txBody>
+          <a:bodyPr wrap="square" rtlCol="0" anchor="t">
+            <a:spAutoFit/>
+          </a:bodyPr>
+          <a:p>
+            <a:r>
+              <a:rPr lang="zh-CN" altLang="en-US">
+                <a:sym typeface="+mn-ea"/>
+              </a:rPr>
+              <a:t>{{P1</a:t>
+            </a:r>
+            <a:r>
+              <a:rPr lang="en-US" altLang="zh-CN">
+                <a:sym typeface="+mn-ea"/>
+              </a:rPr>
+              <a:t>1</a:t>
+            </a:r>
+            <a:r>
+              <a:rPr lang="zh-CN" altLang="en-US">
+                <a:sym typeface="+mn-ea"/>
+              </a:rPr>
+              <a:t>_</a:t>
+            </a:r>
+            <a:r>
+              <a:rPr lang="en-US" altLang="zh-CN">
+                <a:sym typeface="+mn-ea"/>
+              </a:rPr>
+              <a:t>line</a:t>
+            </a:r>
+            <a:r>
+              <a:rPr lang="zh-CN" altLang="en-US">
+                <a:sym typeface="+mn-ea"/>
+              </a:rPr>
+              <a:t>}}</a:t>
+            </a:r>
+            <a:endParaRPr lang="zh-CN" altLang="en-US">
+              <a:sym typeface="+mn-ea"/>
+            </a:endParaRPr>
           </a:p>
         </p:txBody>
       </p:sp>
@@ -13726,6 +14944,12 @@
 </file>
 
 <file path=ppt/tags/tag1.xml><?xml version="1.0" encoding="utf-8"?>
+<p:tagLst xmlns:p="http://schemas.openxmlformats.org/presentationml/2006/main">
+  <p:tag name="KSO_WM_DIAGRAM_VIRTUALLY_FRAME" val="{&quot;height&quot;:394.00007874015745,&quot;left&quot;:84.67007874015748,&quot;top&quot;:100.32062992125984,&quot;width&quot;:790.6598425196851}"/>
+</p:tagLst>
+</file>
+
+<file path=ppt/tags/tag2.xml><?xml version="1.0" encoding="utf-8"?>
 <p:tagLst xmlns:p="http://schemas.openxmlformats.org/presentationml/2006/main">
   <p:tag name="commondata" val="eyJoZGlkIjoiNzBiN2QxNGQ4NjIwZWE5Mjc3ZDY1N2NlMGYwOTU3MDUifQ=="/>
 </p:tagLst>
@@ -14749,4 +15973,248 @@
     </a:bgFillStyleLst>
   </a:fmtScheme>
 </a:themeOverride>
+</file>
+
+<file path=ppt/theme/themeOverride4.xml><?xml version="1.0" encoding="utf-8"?>
+<a:themeOverride xmlns:a="http://schemas.openxmlformats.org/drawingml/2006/main">
+  <a:clrScheme name="WPS">
+    <a:dk1>
+      <a:sysClr val="windowText" lastClr="000000"/>
+    </a:dk1>
+    <a:lt1>
+      <a:sysClr val="window" lastClr="FFFFFF"/>
+    </a:lt1>
+    <a:dk2>
+      <a:srgbClr val="44546A"/>
+    </a:dk2>
+    <a:lt2>
+      <a:srgbClr val="E7E6E6"/>
+    </a:lt2>
+    <a:accent1>
+      <a:srgbClr val="4874CB"/>
+    </a:accent1>
+    <a:accent2>
+      <a:srgbClr val="EE822F"/>
+    </a:accent2>
+    <a:accent3>
+      <a:srgbClr val="F2BA02"/>
+    </a:accent3>
+    <a:accent4>
+      <a:srgbClr val="75BD42"/>
+    </a:accent4>
+    <a:accent5>
+      <a:srgbClr val="30C0B4"/>
+    </a:accent5>
+    <a:accent6>
+      <a:srgbClr val="E54C5E"/>
+    </a:accent6>
+    <a:hlink>
+      <a:srgbClr val="0026E5"/>
+    </a:hlink>
+    <a:folHlink>
+      <a:srgbClr val="7E1FAD"/>
+    </a:folHlink>
+  </a:clrScheme>
+  <a:fontScheme name="WPS">
+    <a:majorFont>
+      <a:latin typeface="Calibri Light"/>
+      <a:ea typeface=""/>
+      <a:cs typeface=""/>
+      <a:font script="Jpan" typeface="ＭＳ Ｐゴシック"/>
+      <a:font script="Hang" typeface="맑은 고딕"/>
+      <a:font script="Hans" typeface="宋体"/>
+      <a:font script="Hant" typeface="新細明體"/>
+      <a:font script="Arab" typeface="Times New Roman"/>
+      <a:font script="Hebr" typeface="Times New Roman"/>
+      <a:font script="Thai" typeface="Tahoma"/>
+      <a:font script="Ethi" typeface="Nyala"/>
+      <a:font script="Beng" typeface="Vrinda"/>
+      <a:font script="Gujr" typeface="Shruti"/>
+      <a:font script="Khmr" typeface="MoolBoran"/>
+      <a:font script="Knda" typeface="Tunga"/>
+      <a:font script="Guru" typeface="Raavi"/>
+      <a:font script="Cans" typeface="Euphemia"/>
+      <a:font script="Cher" typeface="Plantagenet Cherokee"/>
+      <a:font script="Yiii" typeface="Microsoft Yi Baiti"/>
+      <a:font script="Tibt" typeface="Microsoft Himalaya"/>
+      <a:font script="Thaa" typeface="MV Boli"/>
+      <a:font script="Deva" typeface="Mangal"/>
+      <a:font script="Telu" typeface="Gautami"/>
+      <a:font script="Taml" typeface="Latha"/>
+      <a:font script="Syrc" typeface="Estrangelo Edessa"/>
+      <a:font script="Orya" typeface="Kalinga"/>
+      <a:font script="Mlym" typeface="Kartika"/>
+      <a:font script="Laoo" typeface="DokChampa"/>
+      <a:font script="Sinh" typeface="Iskoola Pota"/>
+      <a:font script="Mong" typeface="Mongolian Baiti"/>
+      <a:font script="Viet" typeface="Times New Roman"/>
+      <a:font script="Uigh" typeface="Microsoft Uighur"/>
+      <a:font script="Geor" typeface="Sylfaen"/>
+    </a:majorFont>
+    <a:minorFont>
+      <a:latin typeface="Calibri"/>
+      <a:ea typeface=""/>
+      <a:cs typeface=""/>
+      <a:font script="Jpan" typeface="ＭＳ Ｐゴシック"/>
+      <a:font script="Hang" typeface="맑은 고딕"/>
+      <a:font script="Hans" typeface="宋体"/>
+      <a:font script="Hant" typeface="新細明體"/>
+      <a:font script="Arab" typeface="Arial"/>
+      <a:font script="Hebr" typeface="Arial"/>
+      <a:font script="Thai" typeface="Tahoma"/>
+      <a:font script="Ethi" typeface="Nyala"/>
+      <a:font script="Beng" typeface="Vrinda"/>
+      <a:font script="Gujr" typeface="Shruti"/>
+      <a:font script="Khmr" typeface="DaunPenh"/>
+      <a:font script="Knda" typeface="Tunga"/>
+      <a:font script="Guru" typeface="Raavi"/>
+      <a:font script="Cans" typeface="Euphemia"/>
+      <a:font script="Cher" typeface="Plantagenet Cherokee"/>
+      <a:font script="Yiii" typeface="Microsoft Yi Baiti"/>
+      <a:font script="Tibt" typeface="Microsoft Himalaya"/>
+      <a:font script="Thaa" typeface="MV Boli"/>
+      <a:font script="Deva" typeface="Mangal"/>
+      <a:font script="Telu" typeface="Gautami"/>
+      <a:font script="Taml" typeface="Latha"/>
+      <a:font script="Syrc" typeface="Estrangelo Edessa"/>
+      <a:font script="Orya" typeface="Kalinga"/>
+      <a:font script="Mlym" typeface="Kartika"/>
+      <a:font script="Laoo" typeface="DokChampa"/>
+      <a:font script="Sinh" typeface="Iskoola Pota"/>
+      <a:font script="Mong" typeface="Mongolian Baiti"/>
+      <a:font script="Viet" typeface="Arial"/>
+      <a:font script="Uigh" typeface="Microsoft Uighur"/>
+      <a:font script="Geor" typeface="Sylfaen"/>
+    </a:minorFont>
+  </a:fontScheme>
+  <a:fmtScheme name="WPS">
+    <a:fillStyleLst>
+      <a:solidFill>
+        <a:schemeClr val="phClr"/>
+      </a:solidFill>
+      <a:gradFill>
+        <a:gsLst>
+          <a:gs pos="0">
+            <a:schemeClr val="phClr">
+              <a:lumOff val="17500"/>
+            </a:schemeClr>
+          </a:gs>
+          <a:gs pos="100000">
+            <a:schemeClr val="phClr"/>
+          </a:gs>
+        </a:gsLst>
+        <a:lin ang="2700000" scaled="0"/>
+      </a:gradFill>
+      <a:gradFill>
+        <a:gsLst>
+          <a:gs pos="0">
+            <a:schemeClr val="phClr">
+              <a:hueOff val="-2520000"/>
+            </a:schemeClr>
+          </a:gs>
+          <a:gs pos="100000">
+            <a:schemeClr val="phClr"/>
+          </a:gs>
+        </a:gsLst>
+        <a:lin ang="2700000" scaled="0"/>
+      </a:gradFill>
+    </a:fillStyleLst>
+    <a:lnStyleLst>
+      <a:ln w="12700" cap="flat" cmpd="sng" algn="ctr">
+        <a:solidFill>
+          <a:schemeClr val="phClr"/>
+        </a:solidFill>
+        <a:prstDash val="solid"/>
+        <a:miter lim="800000"/>
+      </a:ln>
+      <a:ln w="12700" cap="flat" cmpd="sng" algn="ctr">
+        <a:solidFill>
+          <a:schemeClr val="phClr"/>
+        </a:solidFill>
+        <a:prstDash val="solid"/>
+        <a:miter lim="800000"/>
+      </a:ln>
+      <a:ln w="12700" cap="flat" cmpd="sng" algn="ctr">
+        <a:gradFill>
+          <a:gsLst>
+            <a:gs pos="0">
+              <a:schemeClr val="phClr">
+                <a:hueOff val="-4200000"/>
+              </a:schemeClr>
+            </a:gs>
+            <a:gs pos="100000">
+              <a:schemeClr val="phClr"/>
+            </a:gs>
+          </a:gsLst>
+          <a:lin ang="2700000" scaled="1"/>
+        </a:gradFill>
+        <a:prstDash val="solid"/>
+        <a:miter lim="800000"/>
+      </a:ln>
+    </a:lnStyleLst>
+    <a:effectStyleLst>
+      <a:effectStyle>
+        <a:effectLst>
+          <a:outerShdw blurRad="101600" dist="50800" dir="5400000" algn="ctr" rotWithShape="0">
+            <a:schemeClr val="phClr">
+              <a:alpha val="60000"/>
+            </a:schemeClr>
+          </a:outerShdw>
+        </a:effectLst>
+      </a:effectStyle>
+      <a:effectStyle>
+        <a:effectLst>
+          <a:reflection stA="50000" endA="300" endPos="40000" dist="25400" dir="5400000" sy="-100000" algn="bl" rotWithShape="0"/>
+        </a:effectLst>
+      </a:effectStyle>
+      <a:effectStyle>
+        <a:effectLst>
+          <a:outerShdw blurRad="57150" dist="19050" dir="5400000" algn="ctr" rotWithShape="0">
+            <a:srgbClr val="000000">
+              <a:alpha val="63000"/>
+            </a:srgbClr>
+          </a:outerShdw>
+        </a:effectLst>
+      </a:effectStyle>
+    </a:effectStyleLst>
+    <a:bgFillStyleLst>
+      <a:solidFill>
+        <a:schemeClr val="phClr"/>
+      </a:solidFill>
+      <a:solidFill>
+        <a:schemeClr val="phClr">
+          <a:tint val="95000"/>
+          <a:satMod val="170000"/>
+        </a:schemeClr>
+      </a:solidFill>
+      <a:gradFill rotWithShape="1">
+        <a:gsLst>
+          <a:gs pos="0">
+            <a:schemeClr val="phClr">
+              <a:tint val="93000"/>
+              <a:satMod val="150000"/>
+              <a:shade val="98000"/>
+              <a:lumMod val="102000"/>
+            </a:schemeClr>
+          </a:gs>
+          <a:gs pos="50000">
+            <a:schemeClr val="phClr">
+              <a:tint val="98000"/>
+              <a:satMod val="130000"/>
+              <a:shade val="90000"/>
+              <a:lumMod val="103000"/>
+            </a:schemeClr>
+          </a:gs>
+          <a:gs pos="100000">
+            <a:schemeClr val="phClr">
+              <a:shade val="63000"/>
+              <a:satMod val="120000"/>
+            </a:schemeClr>
+          </a:gs>
+        </a:gsLst>
+        <a:lin ang="5400000" scaled="0"/>
+      </a:gradFill>
+    </a:bgFillStyleLst>
+  </a:fmtScheme>
+</a:themeOverride>
 </file>
--- a/mss_ai_ppt_sample_assets/backend/data/templates/mss_technical_v2.pptx
+++ b/mss_ai_ppt_sample_assets/backend/data/templates/mss_technical_v2.pptx
@@ -440,6 +440,11 @@
     <c:plotVisOnly val="1"/>
     <c:dispBlanksAs val="gap"/>
     <c:showDLblsOverMax val="0"/>
+    <c:extLst>
+      <c:ext uri="{0b15fc19-7d7d-44ad-8c2d-2c3a37ce22c3}">
+        <chartProps xmlns="https://web.wps.cn/et/2018/main" chartId="{4924535c-5035-48aa-b10c-7f4ac2b42ca6}"/>
+      </c:ext>
+    </c:extLst>
   </c:chart>
   <c:spPr>
     <a:noFill/>
@@ -864,6 +869,11 @@
     <c:plotVisOnly val="1"/>
     <c:dispBlanksAs val="gap"/>
     <c:showDLblsOverMax val="0"/>
+    <c:extLst>
+      <c:ext uri="{0b15fc19-7d7d-44ad-8c2d-2c3a37ce22c3}">
+        <chartProps xmlns="https://web.wps.cn/et/2018/main" chartId="{0da09643-6e7c-4746-86fa-e7cc49812d02}"/>
+      </c:ext>
+    </c:extLst>
   </c:chart>
   <c:spPr>
     <a:noFill/>
@@ -1273,6 +1283,11 @@
     <c:plotVisOnly val="1"/>
     <c:dispBlanksAs val="gap"/>
     <c:showDLblsOverMax val="0"/>
+    <c:extLst>
+      <c:ext uri="{0b15fc19-7d7d-44ad-8c2d-2c3a37ce22c3}">
+        <chartProps xmlns="https://web.wps.cn/et/2018/main" chartId="{c00b20a9-f6f3-4ea1-9350-0b694bb3d1da}"/>
+      </c:ext>
+    </c:extLst>
   </c:chart>
   <c:spPr>
     <a:noFill/>
@@ -1579,6 +1594,11 @@
     <c:plotVisOnly val="1"/>
     <c:dispBlanksAs val="gap"/>
     <c:showDLblsOverMax val="0"/>
+    <c:extLst>
+      <c:ext uri="{0b15fc19-7d7d-44ad-8c2d-2c3a37ce22c3}">
+        <chartProps xmlns="https://web.wps.cn/et/2018/main" chartId="{145ef081-2ca7-46a9-961d-eed65fe4a79a}"/>
+      </c:ext>
+    </c:extLst>
   </c:chart>
   <c:spPr>
     <a:noFill/>
@@ -2151,6 +2171,11 @@
     <c:plotVisOnly val="1"/>
     <c:dispBlanksAs val="gap"/>
     <c:showDLblsOverMax val="0"/>
+    <c:extLst>
+      <c:ext uri="{0b15fc19-7d7d-44ad-8c2d-2c3a37ce22c3}">
+        <chartProps xmlns="https://web.wps.cn/et/2018/main" chartId="{c2707ffa-3113-4d6c-ad35-176c9aaa721e}"/>
+      </c:ext>
+    </c:extLst>
   </c:chart>
   <c:spPr>
     <a:noFill/>
@@ -2709,6 +2734,11 @@
     <c:plotVisOnly val="1"/>
     <c:dispBlanksAs val="gap"/>
     <c:showDLblsOverMax val="0"/>
+    <c:extLst>
+      <c:ext uri="{0b15fc19-7d7d-44ad-8c2d-2c3a37ce22c3}">
+        <chartProps xmlns="https://web.wps.cn/et/2018/main" chartId="{878609dc-bba7-48d6-bfc0-50933bde9a02}"/>
+      </c:ext>
+    </c:extLst>
   </c:chart>
   <c:spPr>
     <a:noFill/>
@@ -3034,6 +3064,11 @@
     <c:plotVisOnly val="1"/>
     <c:dispBlanksAs val="gap"/>
     <c:showDLblsOverMax val="0"/>
+    <c:extLst>
+      <c:ext uri="{0b15fc19-7d7d-44ad-8c2d-2c3a37ce22c3}">
+        <chartProps xmlns="https://web.wps.cn/et/2018/main" chartId="{b9774ebd-9780-46d4-b11a-b0d23499f9d2}"/>
+      </c:ext>
+    </c:extLst>
   </c:chart>
   <c:spPr>
     <a:noFill/>
@@ -10213,7 +10248,7 @@
         <p:spPr>
           <a:xfrm>
             <a:off x="7867015" y="3959225"/>
-            <a:ext cx="6096000" cy="368300"/>
+            <a:ext cx="1256665" cy="368300"/>
           </a:xfrm>
           <a:prstGeom prst="rect">
             <a:avLst/>
@@ -10258,7 +10293,7 @@
         <p:spPr>
           <a:xfrm>
             <a:off x="4208145" y="564515"/>
-            <a:ext cx="6096000" cy="368300"/>
+            <a:ext cx="1256665" cy="368300"/>
           </a:xfrm>
           <a:prstGeom prst="rect">
             <a:avLst/>
@@ -10280,7 +10315,7 @@
               <a:rPr lang="en-US" altLang="zh-CN">
                 <a:sym typeface="+mn-ea"/>
               </a:rPr>
-              <a:t>P12_pie}</a:t>
+              <a:t>P11_pie}</a:t>
             </a:r>
             <a:r>
               <a:rPr lang="zh-CN" altLang="en-US">
@@ -12378,7 +12413,11 @@
         <p:nvSpPr>
           <p:cNvPr id="5" name="TextBox 4"/>
           <p:cNvSpPr txBox="1"/>
-          <p:nvPr/>
+          <p:nvPr>
+            <p:custDataLst>
+              <p:tags r:id="rId2"/>
+            </p:custDataLst>
+          </p:nvPr>
         </p:nvSpPr>
         <p:spPr>
           <a:xfrm>
@@ -12414,7 +12453,11 @@
         <p:nvSpPr>
           <p:cNvPr id="6" name="TextBox 5"/>
           <p:cNvSpPr txBox="1"/>
-          <p:nvPr/>
+          <p:nvPr>
+            <p:custDataLst>
+              <p:tags r:id="rId3"/>
+            </p:custDataLst>
+          </p:nvPr>
         </p:nvSpPr>
         <p:spPr>
           <a:xfrm>
@@ -12450,7 +12493,11 @@
         <p:nvSpPr>
           <p:cNvPr id="8" name="TextBox 7"/>
           <p:cNvSpPr txBox="1"/>
-          <p:nvPr/>
+          <p:nvPr>
+            <p:custDataLst>
+              <p:tags r:id="rId4"/>
+            </p:custDataLst>
+          </p:nvPr>
         </p:nvSpPr>
         <p:spPr>
           <a:xfrm>
@@ -12486,7 +12533,11 @@
         <p:nvSpPr>
           <p:cNvPr id="9" name="TextBox 8"/>
           <p:cNvSpPr txBox="1"/>
-          <p:nvPr/>
+          <p:nvPr>
+            <p:custDataLst>
+              <p:tags r:id="rId5"/>
+            </p:custDataLst>
+          </p:nvPr>
         </p:nvSpPr>
         <p:spPr>
           <a:xfrm>
@@ -12644,7 +12695,7 @@
           <p:cNvSpPr txBox="1"/>
           <p:nvPr>
             <p:custDataLst>
-              <p:tags r:id="rId2"/>
+              <p:tags r:id="rId6"/>
             </p:custDataLst>
           </p:nvPr>
         </p:nvSpPr>
@@ -12946,7 +12997,7 @@
         <p:spPr>
           <a:xfrm>
             <a:off x="6095365" y="3543935"/>
-            <a:ext cx="6096000" cy="368300"/>
+            <a:ext cx="1266825" cy="368300"/>
           </a:xfrm>
           <a:prstGeom prst="rect">
             <a:avLst/>
@@ -14945,11 +14996,35 @@
 
 <file path=ppt/tags/tag1.xml><?xml version="1.0" encoding="utf-8"?>
 <p:tagLst xmlns:p="http://schemas.openxmlformats.org/presentationml/2006/main">
+  <p:tag name="KSO_WM_DIAGRAM_VIRTUALLY_FRAME" val="{&quot;height&quot;:377.999842519685,&quot;left&quot;:61.2,&quot;top&quot;:82.8,&quot;width&quot;:856.8}"/>
+</p:tagLst>
+</file>
+
+<file path=ppt/tags/tag2.xml><?xml version="1.0" encoding="utf-8"?>
+<p:tagLst xmlns:p="http://schemas.openxmlformats.org/presentationml/2006/main">
+  <p:tag name="KSO_WM_DIAGRAM_VIRTUALLY_FRAME" val="{&quot;height&quot;:377.999842519685,&quot;left&quot;:61.2,&quot;top&quot;:82.8,&quot;width&quot;:856.8}"/>
+</p:tagLst>
+</file>
+
+<file path=ppt/tags/tag3.xml><?xml version="1.0" encoding="utf-8"?>
+<p:tagLst xmlns:p="http://schemas.openxmlformats.org/presentationml/2006/main">
+  <p:tag name="KSO_WM_DIAGRAM_VIRTUALLY_FRAME" val="{&quot;height&quot;:377.999842519685,&quot;left&quot;:61.2,&quot;top&quot;:82.8,&quot;width&quot;:856.8}"/>
+</p:tagLst>
+</file>
+
+<file path=ppt/tags/tag4.xml><?xml version="1.0" encoding="utf-8"?>
+<p:tagLst xmlns:p="http://schemas.openxmlformats.org/presentationml/2006/main">
+  <p:tag name="KSO_WM_DIAGRAM_VIRTUALLY_FRAME" val="{&quot;height&quot;:377.999842519685,&quot;left&quot;:61.2,&quot;top&quot;:82.8,&quot;width&quot;:856.8}"/>
+</p:tagLst>
+</file>
+
+<file path=ppt/tags/tag5.xml><?xml version="1.0" encoding="utf-8"?>
+<p:tagLst xmlns:p="http://schemas.openxmlformats.org/presentationml/2006/main">
   <p:tag name="KSO_WM_DIAGRAM_VIRTUALLY_FRAME" val="{&quot;height&quot;:394.00007874015745,&quot;left&quot;:84.67007874015748,&quot;top&quot;:100.32062992125984,&quot;width&quot;:790.6598425196851}"/>
 </p:tagLst>
 </file>
 
-<file path=ppt/tags/tag2.xml><?xml version="1.0" encoding="utf-8"?>
+<file path=ppt/tags/tag6.xml><?xml version="1.0" encoding="utf-8"?>
 <p:tagLst xmlns:p="http://schemas.openxmlformats.org/presentationml/2006/main">
   <p:tag name="commondata" val="eyJoZGlkIjoiNzBiN2QxNGQ4NjIwZWE5Mjc3ZDY1N2NlMGYwOTU3MDUifQ=="/>
 </p:tagLst>
